--- a/assets/pptx/catalog-486.pptx
+++ b/assets/pptx/catalog-486.pptx
@@ -3443,7 +3443,7 @@
                 <a:ea typeface="Ebrima"/>
                 <a:cs typeface="Ebrima"/>
               </a:rPr>
-              <a:t>ላምልክህ ተግቼ (2)</a:t>
+              <a:t>ላምልክህ ተግቼ 2</a:t>
             </a:r>
           </a:p>
         </p:txBody>
